--- a/code_map.pptx
+++ b/code_map.pptx
@@ -197,7 +197,7 @@
           <a:p>
             <a:fld id="{5BC4C314-4F4D-4308-AFB3-1F0D0B58810D}" type="datetimeFigureOut">
               <a:rPr lang="en-US" smtClean="0"/>
-              <a:t>5/27/2025</a:t>
+              <a:t>7/3/2025</a:t>
             </a:fld>
             <a:endParaRPr lang="en-US"/>
           </a:p>
@@ -510,15 +510,105 @@
           <a:p>
             <a:r>
               <a:rPr lang="en-US" dirty="0"/>
-              <a:t>The call </a:t>
-            </a:r>
-            <a:r>
-              <a:rPr lang="en-US"/>
-              <a:t>is in the params file, line 10.</a:t>
-            </a:r>
-          </a:p>
-          <a:p>
-            <a:endParaRPr lang="en-US"/>
+              <a:t>The call is in the params file, line 10.</a:t>
+            </a:r>
+          </a:p>
+          <a:p>
+            <a:endParaRPr lang="en-US" dirty="0"/>
+          </a:p>
+          <a:p>
+            <a:r>
+              <a:rPr lang="en-US" dirty="0" err="1"/>
+              <a:t>Liz_Timecourses_batch_script_generates</a:t>
+            </a:r>
+            <a:r>
+              <a:rPr lang="en-US" dirty="0"/>
+              <a:t> individual subject </a:t>
+            </a:r>
+            <a:r>
+              <a:rPr lang="en-US" dirty="0" err="1"/>
+              <a:t>early_late_TC</a:t>
+            </a:r>
+            <a:r>
+              <a:rPr lang="en-US" dirty="0"/>
+              <a:t> files. This ‘</a:t>
+            </a:r>
+            <a:r>
+              <a:rPr lang="en-US" dirty="0" err="1"/>
+              <a:t>indiv</a:t>
+            </a:r>
+            <a:r>
+              <a:rPr lang="en-US" dirty="0"/>
+              <a:t>’ files are for the classifier (MVPA) analysis :</a:t>
+            </a:r>
+          </a:p>
+          <a:p>
+            <a:r>
+              <a:rPr lang="en-US" dirty="0"/>
+              <a:t>/data2/</a:t>
+            </a:r>
+            <a:r>
+              <a:rPr lang="en-US" dirty="0" err="1"/>
+              <a:t>CCONS_TIBtest</a:t>
+            </a:r>
+            <a:r>
+              <a:rPr lang="en-US" dirty="0"/>
+              <a:t>/</a:t>
+            </a:r>
+            <a:r>
+              <a:rPr lang="en-US" dirty="0" err="1"/>
+              <a:t>timecourse_scripts</a:t>
+            </a:r>
+            <a:r>
+              <a:rPr lang="en-US" dirty="0"/>
+              <a:t>. The outputs are stored in this folder /data2/</a:t>
+            </a:r>
+            <a:r>
+              <a:rPr lang="en-US" dirty="0" err="1"/>
+              <a:t>CCONS_TIBtest</a:t>
+            </a:r>
+            <a:r>
+              <a:rPr lang="en-US" dirty="0"/>
+              <a:t>/</a:t>
+            </a:r>
+            <a:r>
+              <a:rPr lang="en-US" dirty="0" err="1"/>
+              <a:t>grp_timecourses</a:t>
+            </a:r>
+            <a:r>
+              <a:rPr lang="en-US" dirty="0"/>
+              <a:t> which contains group </a:t>
+            </a:r>
+            <a:r>
+              <a:rPr lang="en-US" dirty="0" err="1"/>
+              <a:t>tc</a:t>
+            </a:r>
+            <a:r>
+              <a:rPr lang="en-US" dirty="0"/>
+              <a:t> and also </a:t>
+            </a:r>
+            <a:r>
+              <a:rPr lang="en-US" dirty="0" err="1"/>
+              <a:t>indiv</a:t>
+            </a:r>
+            <a:r>
+              <a:rPr lang="en-US" dirty="0"/>
+              <a:t> TCs, and individual early-</a:t>
+            </a:r>
+            <a:r>
+              <a:rPr lang="en-US" dirty="0" err="1"/>
+              <a:t>latec</a:t>
+            </a:r>
+            <a:r>
+              <a:rPr lang="en-US" dirty="0"/>
+              <a:t> TCs</a:t>
+            </a:r>
+          </a:p>
+          <a:p>
+            <a:endParaRPr lang="en-US" dirty="0"/>
+          </a:p>
+          <a:p>
+            <a:endParaRPr lang="en-US" dirty="0"/>
           </a:p>
         </p:txBody>
       </p:sp>
@@ -705,7 +795,7 @@
           <a:p>
             <a:fld id="{75971C63-3134-492E-9112-1D5D7F800776}" type="datetimeFigureOut">
               <a:rPr lang="en-US" smtClean="0"/>
-              <a:t>5/27/2025</a:t>
+              <a:t>7/3/2025</a:t>
             </a:fld>
             <a:endParaRPr lang="en-US"/>
           </a:p>
@@ -903,7 +993,7 @@
           <a:p>
             <a:fld id="{75971C63-3134-492E-9112-1D5D7F800776}" type="datetimeFigureOut">
               <a:rPr lang="en-US" smtClean="0"/>
-              <a:t>5/27/2025</a:t>
+              <a:t>7/3/2025</a:t>
             </a:fld>
             <a:endParaRPr lang="en-US"/>
           </a:p>
@@ -1111,7 +1201,7 @@
           <a:p>
             <a:fld id="{75971C63-3134-492E-9112-1D5D7F800776}" type="datetimeFigureOut">
               <a:rPr lang="en-US" smtClean="0"/>
-              <a:t>5/27/2025</a:t>
+              <a:t>7/3/2025</a:t>
             </a:fld>
             <a:endParaRPr lang="en-US"/>
           </a:p>
@@ -1309,7 +1399,7 @@
           <a:p>
             <a:fld id="{75971C63-3134-492E-9112-1D5D7F800776}" type="datetimeFigureOut">
               <a:rPr lang="en-US" smtClean="0"/>
-              <a:t>5/27/2025</a:t>
+              <a:t>7/3/2025</a:t>
             </a:fld>
             <a:endParaRPr lang="en-US"/>
           </a:p>
@@ -1584,7 +1674,7 @@
           <a:p>
             <a:fld id="{75971C63-3134-492E-9112-1D5D7F800776}" type="datetimeFigureOut">
               <a:rPr lang="en-US" smtClean="0"/>
-              <a:t>5/27/2025</a:t>
+              <a:t>7/3/2025</a:t>
             </a:fld>
             <a:endParaRPr lang="en-US"/>
           </a:p>
@@ -1849,7 +1939,7 @@
           <a:p>
             <a:fld id="{75971C63-3134-492E-9112-1D5D7F800776}" type="datetimeFigureOut">
               <a:rPr lang="en-US" smtClean="0"/>
-              <a:t>5/27/2025</a:t>
+              <a:t>7/3/2025</a:t>
             </a:fld>
             <a:endParaRPr lang="en-US"/>
           </a:p>
@@ -2261,7 +2351,7 @@
           <a:p>
             <a:fld id="{75971C63-3134-492E-9112-1D5D7F800776}" type="datetimeFigureOut">
               <a:rPr lang="en-US" smtClean="0"/>
-              <a:t>5/27/2025</a:t>
+              <a:t>7/3/2025</a:t>
             </a:fld>
             <a:endParaRPr lang="en-US"/>
           </a:p>
@@ -2402,7 +2492,7 @@
           <a:p>
             <a:fld id="{75971C63-3134-492E-9112-1D5D7F800776}" type="datetimeFigureOut">
               <a:rPr lang="en-US" smtClean="0"/>
-              <a:t>5/27/2025</a:t>
+              <a:t>7/3/2025</a:t>
             </a:fld>
             <a:endParaRPr lang="en-US"/>
           </a:p>
@@ -2515,7 +2605,7 @@
           <a:p>
             <a:fld id="{75971C63-3134-492E-9112-1D5D7F800776}" type="datetimeFigureOut">
               <a:rPr lang="en-US" smtClean="0"/>
-              <a:t>5/27/2025</a:t>
+              <a:t>7/3/2025</a:t>
             </a:fld>
             <a:endParaRPr lang="en-US"/>
           </a:p>
@@ -2826,7 +2916,7 @@
           <a:p>
             <a:fld id="{75971C63-3134-492E-9112-1D5D7F800776}" type="datetimeFigureOut">
               <a:rPr lang="en-US" smtClean="0"/>
-              <a:t>5/27/2025</a:t>
+              <a:t>7/3/2025</a:t>
             </a:fld>
             <a:endParaRPr lang="en-US"/>
           </a:p>
@@ -3114,7 +3204,7 @@
           <a:p>
             <a:fld id="{75971C63-3134-492E-9112-1D5D7F800776}" type="datetimeFigureOut">
               <a:rPr lang="en-US" smtClean="0"/>
-              <a:t>5/27/2025</a:t>
+              <a:t>7/3/2025</a:t>
             </a:fld>
             <a:endParaRPr lang="en-US"/>
           </a:p>
@@ -3355,7 +3445,7 @@
           <a:p>
             <a:fld id="{75971C63-3134-492E-9112-1D5D7F800776}" type="datetimeFigureOut">
               <a:rPr lang="en-US" smtClean="0"/>
-              <a:t>5/27/2025</a:t>
+              <a:t>7/3/2025</a:t>
             </a:fld>
             <a:endParaRPr lang="en-US"/>
           </a:p>
